--- a/Lessons/10_convolutional_networks/Slides/convolutional_networks_slides.pptx
+++ b/Lessons/10_convolutional_networks/Slides/convolutional_networks_slides.pptx
@@ -7460,7 +7460,7 @@
             </a:pPr>
             <a:r>
               <a:rPr/>
-              <a:t>Say the scheduling problem plainly rather than letting them discover it. That same week is the project peer review week - each of them reads two other projects and is read by two - and the reviews they write are assessed alongside the project they submit. Two pieces of work in one week. Anyone who starts the exercise on Thursday will do both badly.</a:t>
+              <a:t>Draw the consequence for them, because it is not obvious. Every other exercise gets discussed in the room the following week, and that discussion is where they find out whether their reasoning held. This one does not, so if it is the one drawn at the exam they will be defending it cold. The repair is to write the markdown cells as though explaining to someone else, on the day they do it.</a:t>
             </a:r>
           </a:p>
           <a:p>
@@ -19327,22 +19327,18 @@
             <a:pPr lvl="0"/>
             <a:r>
               <a:rPr/>
-              <a:t>It falls in the week of the </a:t>
+              <a:t>The one you will have had </a:t>
             </a:r>
             <a:r>
               <a:rPr b="1"/>
-              <a:t>project peer review</a:t>
-            </a:r>
-            <a:r>
-              <a:rPr/>
-              <a:t>: plan for both</a:t>
+              <a:t>least practice defending</a:t>
             </a:r>
           </a:p>
           <a:p>
             <a:pPr lvl="0"/>
             <a:r>
               <a:rPr/>
-              <a:t>Two reviews to write as well as two to receive</a:t>
+              <a:t>Write the reasoning down as you go, not afterwards</a:t>
             </a:r>
           </a:p>
         </p:txBody>

--- a/Lessons/10_convolutional_networks/Slides/convolutional_networks_slides.pptx
+++ b/Lessons/10_convolutional_networks/Slides/convolutional_networks_slides.pptx
@@ -11083,7 +11083,7 @@
             </a:pPr>
             <a:r>
               <a:rPr/>
-              <a:t>27 November 2026</a:t>
+              <a:t>4 December 2026</a:t>
             </a:r>
           </a:p>
         </p:txBody>

--- a/Lessons/10_convolutional_networks/Slides/convolutional_networks_slides.pptx
+++ b/Lessons/10_convolutional_networks/Slides/convolutional_networks_slides.pptx
@@ -3562,7 +3562,21 @@
             </a:pPr>
             <a:r>
               <a:rPr/>
-              <a:t>Invariance is the goal here: after pooling, moving the defect by a pixel often produces a literally identical output. Receptive field growth is the reason depth works at all - stack pooling and small kernels and a 3×3 window at layer four sees most of the die, for nine weights. Precision loss is the bill.</a:t>
+              <a:t>Invariance is the goal here: after pooling, moving the defect by a pixel often produces a literally identical output.</a:t>
+            </a:r>
+          </a:p>
+          <a:p>
+            <a:pPr lvl="0" indent="0" marL="0">
+              <a:buNone/>
+            </a:pPr>
+          </a:p>
+          <a:p>
+            <a:pPr lvl="0" indent="0" marL="0">
+              <a:buNone/>
+            </a:pPr>
+            <a:r>
+              <a:rPr/>
+              <a:t>On the receptive field, count it once with them: a 3×3 kernel after a 2×2 pooling spans 6×6 of the map it pooled, and the first 3×3 layer underneath adds one pixel on each side, so 8×8 of the image. Handout section 4.2. Receptive field growth is the reason depth works at all - stack pooling and small kernels and a 3×3 window at layer four sees most of the die, for nine weights. Precision loss is the bill.</a:t>
             </a:r>
           </a:p>
           <a:p>
@@ -14294,7 +14308,7 @@
             <a:pPr lvl="0"/>
             <a:r>
               <a:rPr/>
-              <a:t>Enlarges the receptive field: 3×3 after pooling covers 6×6 of the image</a:t>
+              <a:t>Enlarges the receptive field: 3×3 after pooling covers 8×8 of the image</a:t>
             </a:r>
           </a:p>
           <a:p>

--- a/Lessons/10_convolutional_networks/Slides/convolutional_networks_slides.pptx
+++ b/Lessons/10_convolutional_networks/Slides/convolutional_networks_slides.pptx
@@ -7620,7 +7620,7 @@
             </a:pPr>
             <a:r>
               <a:rPr/>
-              <a:t>Thank them, remind them of the project deadline and the office hours, and stop.</a:t>
+              <a:t>Thank them, remind them that the exam draws one of the ten exercises and asks them to talk through their own notebook, point them to the office hours, and stop.</a:t>
             </a:r>
           </a:p>
         </p:txBody>
@@ -19468,7 +19468,7 @@
             <a:pPr lvl="0"/>
             <a:r>
               <a:rPr/>
-              <a:t>Thank you, and good luck with the project</a:t>
+              <a:t>Thank you, and good luck at the exam</a:t>
             </a:r>
           </a:p>
         </p:txBody>

--- a/Lessons/10_convolutional_networks/Slides/convolutional_networks_slides.pptx
+++ b/Lessons/10_convolutional_networks/Slides/convolutional_networks_slides.pptx
@@ -7716,7 +7716,7 @@
             </a:pPr>
             <a:r>
               <a:rPr/>
-              <a:t>The point of the list is not nostalgia. Each of these numbers was a surprise to somebody who had the correct general principle already: leakage is bad, imputation must sit inside the fold, regularisation controls coefficients, anomalies are relational, sigmoids attenuate gradients. Knowing the principle did not protect anyone. Seeing the number did.</a:t>
+              <a:t>The point of the list is not nostalgia. Each of these numbers was a surprise to somebody who had the correct general principle already: leakage is bad, imputation must sit inside the fold, regularisation controls coefficients, anomalies are relational, depth pays only when inputs act together. Knowing the principle did not protect anyone. Seeing the number did.</a:t>
             </a:r>
           </a:p>
           <a:p>
@@ -19219,7 +19219,7 @@
             <a:pPr lvl="0"/>
             <a:r>
               <a:rPr/>
-              <a:t>Lesson 9: a hidden layer worth 39 points on one problem, 0.09 on another</a:t>
+              <a:t>Lesson 9: a hidden layer worth 39 points on one problem, 2.8 on another</a:t>
             </a:r>
           </a:p>
           <a:p>
@@ -19717,11 +19717,23 @@
             <a:pPr lvl="0"/>
             <a:r>
               <a:rPr/>
-              <a:t>A sigmoid layer divides the gradient by about </a:t>
+              <a:t>A hidden layer: worth </a:t>
             </a:r>
             <a:r>
               <a:rPr b="1"/>
-              <a:t>four</a:t>
+              <a:t>39</a:t>
+            </a:r>
+            <a:r>
+              <a:rPr/>
+              <a:t> points on one problem, </a:t>
+            </a:r>
+            <a:r>
+              <a:rPr b="1"/>
+              <a:t>2.8</a:t>
+            </a:r>
+            <a:r>
+              <a:rPr/>
+              <a:t> on another</a:t>
             </a:r>
           </a:p>
         </p:txBody>

--- a/Lessons/10_convolutional_networks/Slides/convolutional_networks_slides.pptx
+++ b/Lessons/10_convolutional_networks/Slides/convolutional_networks_slides.pptx
@@ -11097,7 +11097,7 @@
             </a:pPr>
             <a:r>
               <a:rPr/>
-              <a:t>4 December 2026</a:t>
+              <a:t>11 December 2026</a:t>
             </a:r>
           </a:p>
         </p:txBody>
